--- a/01-delivered-case-studies/creatrix-marketing-analytics/Deck/Executive_Deck.pptx
+++ b/01-delivered-case-studies/creatrix-marketing-analytics/Deck/Executive_Deck.pptx
@@ -1391,7 +1391,7 @@
     <p:bg>
       <p:bgPr>
         <a:solidFill>
-          <a:srgbClr val="15253D"/>
+          <a:srgbClr val="0A0F1A"/>
         </a:solidFill>
       </p:bgPr>
     </p:bg>
@@ -1436,7 +1436,7 @@
             <a:r>
               <a:rPr lang="en-US" sz="1300" b="1" spc="200" kern="0" dirty="0">
                 <a:solidFill>
-                  <a:srgbClr val="5EEAD4"/>
+                  <a:srgbClr val="E8B84A"/>
                 </a:solidFill>
                 <a:latin typeface="Arial" pitchFamily="34" charset="0"/>
                 <a:ea typeface="Arial" pitchFamily="34" charset="-122"/>
@@ -1457,7 +1457,7 @@
         <p:spPr>
           <a:xfrm>
             <a:off x="731520" y="1645920"/>
-            <a:ext cx="10515600" cy="1463040"/>
+            <a:ext cx="7437120" cy="1463040"/>
           </a:xfrm>
           <a:prstGeom prst="rect">
             <a:avLst/>
@@ -1473,7 +1473,7 @@
               <a:buNone/>
             </a:pPr>
             <a:r>
-              <a:rPr lang="en-US" sz="4000" b="1" dirty="0">
+              <a:rPr lang="en-US" sz="2800" b="1" dirty="0">
                 <a:solidFill>
                   <a:srgbClr val="FFFFFF"/>
                 </a:solidFill>
@@ -1543,11 +1543,15 @@
           <a:noFill/>
           <a:ln w="25400">
             <a:solidFill>
-              <a:srgbClr val="5EEAD4"/>
+              <a:srgbClr val="E8B84A"/>
             </a:solidFill>
             <a:prstDash val="solid"/>
           </a:ln>
         </p:spPr>
+        <p:txBody>
+          <a:bodyPr/>
+          <a:p/>
+        </p:txBody>
       </p:sp>
       <p:sp>
         <p:nvSpPr>
@@ -1679,6 +1683,74 @@
               <a:t>Digital Marketing Analyst and Delivery Lead</a:t>
             </a:r>
             <a:endParaRPr lang="en-US" sz="1400" dirty="0"/>
+          </a:p>
+        </p:txBody>
+      </p:sp>
+      <p:pic>
+        <p:nvPicPr>
+          <p:cNvPr id="7" name="Picture 6" descr="creatrix_logo.png"/>
+          <p:cNvPicPr>
+            <a:picLocks noChangeAspect="1"/>
+          </p:cNvPicPr>
+          <p:nvPr/>
+        </p:nvPicPr>
+        <p:blipFill>
+          <a:blip r:embed="rId3"/>
+          <a:stretch>
+            <a:fillRect/>
+          </a:stretch>
+        </p:blipFill>
+        <p:spPr>
+          <a:xfrm>
+            <a:off x="8890395" y="457200"/>
+            <a:ext cx="2396970" cy="1097280"/>
+          </a:xfrm>
+          <a:prstGeom prst="rect">
+            <a:avLst/>
+          </a:prstGeom>
+        </p:spPr>
+      </p:pic>
+      <p:sp>
+        <p:nvSpPr>
+          <p:cNvPr id="8" name="Rectangle 7"/>
+          <p:cNvSpPr/>
+          <p:nvPr/>
+        </p:nvSpPr>
+        <p:spPr>
+          <a:xfrm>
+            <a:off x="0" y="6693408"/>
+            <a:ext cx="12192000" cy="164592"/>
+          </a:xfrm>
+          <a:prstGeom prst="rect">
+            <a:avLst/>
+          </a:prstGeom>
+          <a:solidFill>
+            <a:srgbClr val="E8B84A"/>
+          </a:solidFill>
+          <a:ln>
+            <a:noFill/>
+          </a:ln>
+          <a:effectLst/>
+        </p:spPr>
+        <p:style>
+          <a:lnRef idx="1">
+            <a:schemeClr val="accent1"/>
+          </a:lnRef>
+          <a:fillRef idx="3">
+            <a:schemeClr val="accent1"/>
+          </a:fillRef>
+          <a:effectRef idx="2">
+            <a:schemeClr val="accent1"/>
+          </a:effectRef>
+          <a:fontRef idx="minor">
+            <a:schemeClr val="lt1"/>
+          </a:fontRef>
+        </p:style>
+        <p:txBody>
+          <a:bodyPr rtlCol="0" anchor="ctr"/>
+          <a:lstStyle/>
+          <a:p>
+            <a:pPr algn="ctr"/>
           </a:p>
         </p:txBody>
       </p:sp>
@@ -1741,7 +1813,7 @@
             <a:r>
               <a:rPr lang="en-US" sz="2600" b="1" dirty="0">
                 <a:solidFill>
-                  <a:srgbClr val="15253D"/>
+                  <a:srgbClr val="0A0F1A"/>
                 </a:solidFill>
                 <a:latin typeface="Arial" pitchFamily="34" charset="0"/>
                 <a:ea typeface="Arial" pitchFamily="34" charset="-122"/>
@@ -1768,11 +1840,11 @@
             <a:avLst/>
           </a:prstGeom>
           <a:solidFill>
-            <a:srgbClr val="F4F7FB"/>
+            <a:srgbClr val="F2F8FD"/>
           </a:solidFill>
           <a:ln w="12700">
             <a:solidFill>
-              <a:srgbClr val="F4F7FB"/>
+              <a:srgbClr val="F2F8FD"/>
             </a:solidFill>
             <a:prstDash val="solid"/>
           </a:ln>
@@ -1805,7 +1877,7 @@
             <a:r>
               <a:rPr lang="en-US" sz="1400" b="1" dirty="0">
                 <a:solidFill>
-                  <a:srgbClr val="0F766E"/>
+                  <a:srgbClr val="1E7FC0"/>
                 </a:solidFill>
                 <a:latin typeface="Arial" pitchFamily="34" charset="0"/>
                 <a:ea typeface="Arial" pitchFamily="34" charset="-122"/>
@@ -1883,7 +1955,7 @@
             <a:r>
               <a:rPr lang="en-US" sz="1400" b="1" dirty="0">
                 <a:solidFill>
-                  <a:srgbClr val="0F766E"/>
+                  <a:srgbClr val="1E7FC0"/>
                 </a:solidFill>
                 <a:latin typeface="Arial" pitchFamily="34" charset="0"/>
                 <a:ea typeface="Arial" pitchFamily="34" charset="-122"/>
@@ -1910,11 +1982,11 @@
             <a:avLst/>
           </a:prstGeom>
           <a:solidFill>
-            <a:srgbClr val="EA580C"/>
+            <a:srgbClr val="3CA8E4"/>
           </a:solidFill>
           <a:ln w="12700">
             <a:solidFill>
-              <a:srgbClr val="EA580C"/>
+              <a:srgbClr val="3CA8E4"/>
             </a:solidFill>
             <a:prstDash val="solid"/>
           </a:ln>
@@ -2013,11 +2085,11 @@
             <a:avLst/>
           </a:prstGeom>
           <a:solidFill>
-            <a:srgbClr val="EA580C"/>
+            <a:srgbClr val="3CA8E4"/>
           </a:solidFill>
           <a:ln w="12700">
             <a:solidFill>
-              <a:srgbClr val="EA580C"/>
+              <a:srgbClr val="3CA8E4"/>
             </a:solidFill>
             <a:prstDash val="solid"/>
           </a:ln>
@@ -2116,11 +2188,11 @@
             <a:avLst/>
           </a:prstGeom>
           <a:solidFill>
-            <a:srgbClr val="EA580C"/>
+            <a:srgbClr val="3CA8E4"/>
           </a:solidFill>
           <a:ln w="12700">
             <a:solidFill>
-              <a:srgbClr val="EA580C"/>
+              <a:srgbClr val="3CA8E4"/>
             </a:solidFill>
             <a:prstDash val="solid"/>
           </a:ln>
@@ -2282,6 +2354,118 @@
           </a:p>
         </p:txBody>
       </p:sp>
+      <p:sp>
+        <p:nvSpPr>
+          <p:cNvPr id="18" name="Rectangle 17"/>
+          <p:cNvSpPr/>
+          <p:nvPr/>
+        </p:nvSpPr>
+        <p:spPr>
+          <a:xfrm>
+            <a:off x="0" y="0"/>
+            <a:ext cx="12192000" cy="82296"/>
+          </a:xfrm>
+          <a:prstGeom prst="rect">
+            <a:avLst/>
+          </a:prstGeom>
+          <a:solidFill>
+            <a:srgbClr val="0A0F1A"/>
+          </a:solidFill>
+          <a:ln>
+            <a:noFill/>
+          </a:ln>
+          <a:effectLst/>
+        </p:spPr>
+        <p:style>
+          <a:lnRef idx="1">
+            <a:schemeClr val="accent1"/>
+          </a:lnRef>
+          <a:fillRef idx="3">
+            <a:schemeClr val="accent1"/>
+          </a:fillRef>
+          <a:effectRef idx="2">
+            <a:schemeClr val="accent1"/>
+          </a:effectRef>
+          <a:fontRef idx="minor">
+            <a:schemeClr val="lt1"/>
+          </a:fontRef>
+        </p:style>
+        <p:txBody>
+          <a:bodyPr rtlCol="0" anchor="ctr"/>
+          <a:lstStyle/>
+          <a:p>
+            <a:pPr algn="ctr"/>
+          </a:p>
+        </p:txBody>
+      </p:sp>
+      <p:sp>
+        <p:nvSpPr>
+          <p:cNvPr id="19" name="Rectangle 18"/>
+          <p:cNvSpPr/>
+          <p:nvPr/>
+        </p:nvSpPr>
+        <p:spPr>
+          <a:xfrm>
+            <a:off x="0" y="82296"/>
+            <a:ext cx="1463040" cy="45720"/>
+          </a:xfrm>
+          <a:prstGeom prst="rect">
+            <a:avLst/>
+          </a:prstGeom>
+          <a:solidFill>
+            <a:srgbClr val="3CA8E4"/>
+          </a:solidFill>
+          <a:ln>
+            <a:noFill/>
+          </a:ln>
+          <a:effectLst/>
+        </p:spPr>
+        <p:style>
+          <a:lnRef idx="1">
+            <a:schemeClr val="accent1"/>
+          </a:lnRef>
+          <a:fillRef idx="3">
+            <a:schemeClr val="accent1"/>
+          </a:fillRef>
+          <a:effectRef idx="2">
+            <a:schemeClr val="accent1"/>
+          </a:effectRef>
+          <a:fontRef idx="minor">
+            <a:schemeClr val="lt1"/>
+          </a:fontRef>
+        </p:style>
+        <p:txBody>
+          <a:bodyPr rtlCol="0" anchor="ctr"/>
+          <a:lstStyle/>
+          <a:p>
+            <a:pPr algn="ctr"/>
+          </a:p>
+        </p:txBody>
+      </p:sp>
+      <p:pic>
+        <p:nvPicPr>
+          <p:cNvPr id="20" name="Picture 19" descr="creatrix_logo.png"/>
+          <p:cNvPicPr>
+            <a:picLocks noChangeAspect="1"/>
+          </p:cNvPicPr>
+          <p:nvPr/>
+        </p:nvPicPr>
+        <p:blipFill>
+          <a:blip r:embed="rId3"/>
+          <a:stretch>
+            <a:fillRect/>
+          </a:stretch>
+        </p:blipFill>
+        <p:spPr>
+          <a:xfrm>
+            <a:off x="10446650" y="6336792"/>
+            <a:ext cx="838939" cy="384048"/>
+          </a:xfrm>
+          <a:prstGeom prst="rect">
+            <a:avLst/>
+          </a:prstGeom>
+        </p:spPr>
+      </p:pic>
     </p:spTree>
   </p:cSld>
   <p:clrMapOvr>
@@ -2341,7 +2525,7 @@
             <a:r>
               <a:rPr lang="en-US" sz="2600" b="1" dirty="0">
                 <a:solidFill>
-                  <a:srgbClr val="15253D"/>
+                  <a:srgbClr val="0A0F1A"/>
                 </a:solidFill>
                 <a:latin typeface="Arial" pitchFamily="34" charset="0"/>
                 <a:ea typeface="Arial" pitchFamily="34" charset="-122"/>
@@ -2494,6 +2678,118 @@
           </a:p>
         </p:txBody>
       </p:sp>
+      <p:sp>
+        <p:nvSpPr>
+          <p:cNvPr id="7" name="Rectangle 6"/>
+          <p:cNvSpPr/>
+          <p:nvPr/>
+        </p:nvSpPr>
+        <p:spPr>
+          <a:xfrm>
+            <a:off x="0" y="0"/>
+            <a:ext cx="12192000" cy="82296"/>
+          </a:xfrm>
+          <a:prstGeom prst="rect">
+            <a:avLst/>
+          </a:prstGeom>
+          <a:solidFill>
+            <a:srgbClr val="0A0F1A"/>
+          </a:solidFill>
+          <a:ln>
+            <a:noFill/>
+          </a:ln>
+          <a:effectLst/>
+        </p:spPr>
+        <p:style>
+          <a:lnRef idx="1">
+            <a:schemeClr val="accent1"/>
+          </a:lnRef>
+          <a:fillRef idx="3">
+            <a:schemeClr val="accent1"/>
+          </a:fillRef>
+          <a:effectRef idx="2">
+            <a:schemeClr val="accent1"/>
+          </a:effectRef>
+          <a:fontRef idx="minor">
+            <a:schemeClr val="lt1"/>
+          </a:fontRef>
+        </p:style>
+        <p:txBody>
+          <a:bodyPr rtlCol="0" anchor="ctr"/>
+          <a:lstStyle/>
+          <a:p>
+            <a:pPr algn="ctr"/>
+          </a:p>
+        </p:txBody>
+      </p:sp>
+      <p:sp>
+        <p:nvSpPr>
+          <p:cNvPr id="8" name="Rectangle 7"/>
+          <p:cNvSpPr/>
+          <p:nvPr/>
+        </p:nvSpPr>
+        <p:spPr>
+          <a:xfrm>
+            <a:off x="0" y="82296"/>
+            <a:ext cx="1463040" cy="45720"/>
+          </a:xfrm>
+          <a:prstGeom prst="rect">
+            <a:avLst/>
+          </a:prstGeom>
+          <a:solidFill>
+            <a:srgbClr val="3CA8E4"/>
+          </a:solidFill>
+          <a:ln>
+            <a:noFill/>
+          </a:ln>
+          <a:effectLst/>
+        </p:spPr>
+        <p:style>
+          <a:lnRef idx="1">
+            <a:schemeClr val="accent1"/>
+          </a:lnRef>
+          <a:fillRef idx="3">
+            <a:schemeClr val="accent1"/>
+          </a:fillRef>
+          <a:effectRef idx="2">
+            <a:schemeClr val="accent1"/>
+          </a:effectRef>
+          <a:fontRef idx="minor">
+            <a:schemeClr val="lt1"/>
+          </a:fontRef>
+        </p:style>
+        <p:txBody>
+          <a:bodyPr rtlCol="0" anchor="ctr"/>
+          <a:lstStyle/>
+          <a:p>
+            <a:pPr algn="ctr"/>
+          </a:p>
+        </p:txBody>
+      </p:sp>
+      <p:pic>
+        <p:nvPicPr>
+          <p:cNvPr id="9" name="Picture 8" descr="creatrix_logo.png"/>
+          <p:cNvPicPr>
+            <a:picLocks noChangeAspect="1"/>
+          </p:cNvPicPr>
+          <p:nvPr/>
+        </p:nvPicPr>
+        <p:blipFill>
+          <a:blip r:embed="rId4"/>
+          <a:stretch>
+            <a:fillRect/>
+          </a:stretch>
+        </p:blipFill>
+        <p:spPr>
+          <a:xfrm>
+            <a:off x="10446650" y="6336792"/>
+            <a:ext cx="838939" cy="384048"/>
+          </a:xfrm>
+          <a:prstGeom prst="rect">
+            <a:avLst/>
+          </a:prstGeom>
+        </p:spPr>
+      </p:pic>
     </p:spTree>
   </p:cSld>
   <p:clrMapOvr>
@@ -2553,7 +2849,7 @@
             <a:r>
               <a:rPr lang="en-US" sz="2600" b="1" dirty="0">
                 <a:solidFill>
-                  <a:srgbClr val="15253D"/>
+                  <a:srgbClr val="0A0F1A"/>
                 </a:solidFill>
                 <a:latin typeface="Arial" pitchFamily="34" charset="0"/>
                 <a:ea typeface="Arial" pitchFamily="34" charset="-122"/>
@@ -2706,6 +3002,118 @@
           </a:p>
         </p:txBody>
       </p:sp>
+      <p:sp>
+        <p:nvSpPr>
+          <p:cNvPr id="7" name="Rectangle 6"/>
+          <p:cNvSpPr/>
+          <p:nvPr/>
+        </p:nvSpPr>
+        <p:spPr>
+          <a:xfrm>
+            <a:off x="0" y="0"/>
+            <a:ext cx="12192000" cy="82296"/>
+          </a:xfrm>
+          <a:prstGeom prst="rect">
+            <a:avLst/>
+          </a:prstGeom>
+          <a:solidFill>
+            <a:srgbClr val="0A0F1A"/>
+          </a:solidFill>
+          <a:ln>
+            <a:noFill/>
+          </a:ln>
+          <a:effectLst/>
+        </p:spPr>
+        <p:style>
+          <a:lnRef idx="1">
+            <a:schemeClr val="accent1"/>
+          </a:lnRef>
+          <a:fillRef idx="3">
+            <a:schemeClr val="accent1"/>
+          </a:fillRef>
+          <a:effectRef idx="2">
+            <a:schemeClr val="accent1"/>
+          </a:effectRef>
+          <a:fontRef idx="minor">
+            <a:schemeClr val="lt1"/>
+          </a:fontRef>
+        </p:style>
+        <p:txBody>
+          <a:bodyPr rtlCol="0" anchor="ctr"/>
+          <a:lstStyle/>
+          <a:p>
+            <a:pPr algn="ctr"/>
+          </a:p>
+        </p:txBody>
+      </p:sp>
+      <p:sp>
+        <p:nvSpPr>
+          <p:cNvPr id="8" name="Rectangle 7"/>
+          <p:cNvSpPr/>
+          <p:nvPr/>
+        </p:nvSpPr>
+        <p:spPr>
+          <a:xfrm>
+            <a:off x="0" y="82296"/>
+            <a:ext cx="1463040" cy="45720"/>
+          </a:xfrm>
+          <a:prstGeom prst="rect">
+            <a:avLst/>
+          </a:prstGeom>
+          <a:solidFill>
+            <a:srgbClr val="3CA8E4"/>
+          </a:solidFill>
+          <a:ln>
+            <a:noFill/>
+          </a:ln>
+          <a:effectLst/>
+        </p:spPr>
+        <p:style>
+          <a:lnRef idx="1">
+            <a:schemeClr val="accent1"/>
+          </a:lnRef>
+          <a:fillRef idx="3">
+            <a:schemeClr val="accent1"/>
+          </a:fillRef>
+          <a:effectRef idx="2">
+            <a:schemeClr val="accent1"/>
+          </a:effectRef>
+          <a:fontRef idx="minor">
+            <a:schemeClr val="lt1"/>
+          </a:fontRef>
+        </p:style>
+        <p:txBody>
+          <a:bodyPr rtlCol="0" anchor="ctr"/>
+          <a:lstStyle/>
+          <a:p>
+            <a:pPr algn="ctr"/>
+          </a:p>
+        </p:txBody>
+      </p:sp>
+      <p:pic>
+        <p:nvPicPr>
+          <p:cNvPr id="9" name="Picture 8" descr="creatrix_logo.png"/>
+          <p:cNvPicPr>
+            <a:picLocks noChangeAspect="1"/>
+          </p:cNvPicPr>
+          <p:nvPr/>
+        </p:nvPicPr>
+        <p:blipFill>
+          <a:blip r:embed="rId4"/>
+          <a:stretch>
+            <a:fillRect/>
+          </a:stretch>
+        </p:blipFill>
+        <p:spPr>
+          <a:xfrm>
+            <a:off x="10446650" y="6336792"/>
+            <a:ext cx="838939" cy="384048"/>
+          </a:xfrm>
+          <a:prstGeom prst="rect">
+            <a:avLst/>
+          </a:prstGeom>
+        </p:spPr>
+      </p:pic>
     </p:spTree>
   </p:cSld>
   <p:clrMapOvr>
@@ -2765,7 +3173,7 @@
             <a:r>
               <a:rPr lang="en-US" sz="2600" b="1" dirty="0">
                 <a:solidFill>
-                  <a:srgbClr val="15253D"/>
+                  <a:srgbClr val="0A0F1A"/>
                 </a:solidFill>
                 <a:latin typeface="Arial" pitchFamily="34" charset="0"/>
                 <a:ea typeface="Arial" pitchFamily="34" charset="-122"/>
@@ -2834,7 +3242,7 @@
                   <a:tcPr marL="109728" marR="109728" marT="109728" marB="109728" anchor="ctr">
                     <a:lnL w="9525" cap="flat" cmpd="sng" algn="ctr">
                       <a:solidFill>
-                        <a:srgbClr val="D5DDE8"/>
+                        <a:srgbClr val="D2E6F4"/>
                       </a:solidFill>
                       <a:prstDash val="solid"/>
                       <a:round/>
@@ -2843,7 +3251,7 @@
                     </a:lnL>
                     <a:lnR w="9525" cap="flat" cmpd="sng" algn="ctr">
                       <a:solidFill>
-                        <a:srgbClr val="D5DDE8"/>
+                        <a:srgbClr val="D2E6F4"/>
                       </a:solidFill>
                       <a:prstDash val="solid"/>
                       <a:round/>
@@ -2852,7 +3260,7 @@
                     </a:lnR>
                     <a:lnT w="9525" cap="flat" cmpd="sng" algn="ctr">
                       <a:solidFill>
-                        <a:srgbClr val="D5DDE8"/>
+                        <a:srgbClr val="D2E6F4"/>
                       </a:solidFill>
                       <a:prstDash val="solid"/>
                       <a:round/>
@@ -2861,7 +3269,7 @@
                     </a:lnT>
                     <a:lnB w="9525" cap="flat" cmpd="sng" algn="ctr">
                       <a:solidFill>
-                        <a:srgbClr val="D5DDE8"/>
+                        <a:srgbClr val="D2E6F4"/>
                       </a:solidFill>
                       <a:prstDash val="solid"/>
                       <a:round/>
@@ -2869,7 +3277,7 @@
                       <a:tailEnd type="none" w="med" len="med"/>
                     </a:lnB>
                     <a:solidFill>
-                      <a:srgbClr val="15253D"/>
+                      <a:srgbClr val="0A0F1A"/>
                     </a:solidFill>
                   </a:tcPr>
                 </a:tc>
@@ -2902,7 +3310,7 @@
                   <a:tcPr marL="109728" marR="109728" marT="109728" marB="109728" anchor="ctr">
                     <a:lnL w="9525" cap="flat" cmpd="sng" algn="ctr">
                       <a:solidFill>
-                        <a:srgbClr val="D5DDE8"/>
+                        <a:srgbClr val="D2E6F4"/>
                       </a:solidFill>
                       <a:prstDash val="solid"/>
                       <a:round/>
@@ -2911,7 +3319,7 @@
                     </a:lnL>
                     <a:lnR w="9525" cap="flat" cmpd="sng" algn="ctr">
                       <a:solidFill>
-                        <a:srgbClr val="D5DDE8"/>
+                        <a:srgbClr val="D2E6F4"/>
                       </a:solidFill>
                       <a:prstDash val="solid"/>
                       <a:round/>
@@ -2920,7 +3328,7 @@
                     </a:lnR>
                     <a:lnT w="9525" cap="flat" cmpd="sng" algn="ctr">
                       <a:solidFill>
-                        <a:srgbClr val="D5DDE8"/>
+                        <a:srgbClr val="D2E6F4"/>
                       </a:solidFill>
                       <a:prstDash val="solid"/>
                       <a:round/>
@@ -2929,7 +3337,7 @@
                     </a:lnT>
                     <a:lnB w="9525" cap="flat" cmpd="sng" algn="ctr">
                       <a:solidFill>
-                        <a:srgbClr val="D5DDE8"/>
+                        <a:srgbClr val="D2E6F4"/>
                       </a:solidFill>
                       <a:prstDash val="solid"/>
                       <a:round/>
@@ -2937,7 +3345,7 @@
                       <a:tailEnd type="none" w="med" len="med"/>
                     </a:lnB>
                     <a:solidFill>
-                      <a:srgbClr val="15253D"/>
+                      <a:srgbClr val="0A0F1A"/>
                     </a:solidFill>
                   </a:tcPr>
                 </a:tc>
@@ -2970,7 +3378,7 @@
                   <a:tcPr marL="109728" marR="109728" marT="109728" marB="109728" anchor="ctr">
                     <a:lnL w="9525" cap="flat" cmpd="sng" algn="ctr">
                       <a:solidFill>
-                        <a:srgbClr val="D5DDE8"/>
+                        <a:srgbClr val="D2E6F4"/>
                       </a:solidFill>
                       <a:prstDash val="solid"/>
                       <a:round/>
@@ -2979,7 +3387,7 @@
                     </a:lnL>
                     <a:lnR w="9525" cap="flat" cmpd="sng" algn="ctr">
                       <a:solidFill>
-                        <a:srgbClr val="D5DDE8"/>
+                        <a:srgbClr val="D2E6F4"/>
                       </a:solidFill>
                       <a:prstDash val="solid"/>
                       <a:round/>
@@ -2988,7 +3396,7 @@
                     </a:lnR>
                     <a:lnT w="9525" cap="flat" cmpd="sng" algn="ctr">
                       <a:solidFill>
-                        <a:srgbClr val="D5DDE8"/>
+                        <a:srgbClr val="D2E6F4"/>
                       </a:solidFill>
                       <a:prstDash val="solid"/>
                       <a:round/>
@@ -2997,7 +3405,7 @@
                     </a:lnT>
                     <a:lnB w="9525" cap="flat" cmpd="sng" algn="ctr">
                       <a:solidFill>
-                        <a:srgbClr val="D5DDE8"/>
+                        <a:srgbClr val="D2E6F4"/>
                       </a:solidFill>
                       <a:prstDash val="solid"/>
                       <a:round/>
@@ -3005,7 +3413,7 @@
                       <a:tailEnd type="none" w="med" len="med"/>
                     </a:lnB>
                     <a:solidFill>
-                      <a:srgbClr val="15253D"/>
+                      <a:srgbClr val="0A0F1A"/>
                     </a:solidFill>
                   </a:tcPr>
                 </a:tc>
@@ -3022,7 +3430,7 @@
                       <a:r>
                         <a:rPr lang="en-US" sz="1500" b="1" dirty="0">
                           <a:solidFill>
-                            <a:srgbClr val="0F766E"/>
+                            <a:srgbClr val="1E7FC0"/>
                           </a:solidFill>
                           <a:latin typeface="Arial" pitchFamily="34" charset="0"/>
                           <a:ea typeface="Arial" pitchFamily="34" charset="-122"/>
@@ -3040,7 +3448,7 @@
                   <a:tcPr marL="109728" marR="109728" marT="109728" marB="109728" anchor="ctr">
                     <a:lnL w="9525" cap="flat" cmpd="sng" algn="ctr">
                       <a:solidFill>
-                        <a:srgbClr val="D5DDE8"/>
+                        <a:srgbClr val="D2E6F4"/>
                       </a:solidFill>
                       <a:prstDash val="solid"/>
                       <a:round/>
@@ -3049,7 +3457,7 @@
                     </a:lnL>
                     <a:lnR w="9525" cap="flat" cmpd="sng" algn="ctr">
                       <a:solidFill>
-                        <a:srgbClr val="D5DDE8"/>
+                        <a:srgbClr val="D2E6F4"/>
                       </a:solidFill>
                       <a:prstDash val="solid"/>
                       <a:round/>
@@ -3058,7 +3466,7 @@
                     </a:lnR>
                     <a:lnT w="9525" cap="flat" cmpd="sng" algn="ctr">
                       <a:solidFill>
-                        <a:srgbClr val="D5DDE8"/>
+                        <a:srgbClr val="D2E6F4"/>
                       </a:solidFill>
                       <a:prstDash val="solid"/>
                       <a:round/>
@@ -3067,7 +3475,7 @@
                     </a:lnT>
                     <a:lnB w="9525" cap="flat" cmpd="sng" algn="ctr">
                       <a:solidFill>
-                        <a:srgbClr val="D5DDE8"/>
+                        <a:srgbClr val="D2E6F4"/>
                       </a:solidFill>
                       <a:prstDash val="solid"/>
                       <a:round/>
@@ -3075,7 +3483,7 @@
                       <a:tailEnd type="none" w="med" len="med"/>
                     </a:lnB>
                     <a:solidFill>
-                      <a:srgbClr val="F4F7FB"/>
+                      <a:srgbClr val="F2F8FD"/>
                     </a:solidFill>
                   </a:tcPr>
                 </a:tc>
@@ -3108,7 +3516,7 @@
                   <a:tcPr marL="109728" marR="109728" marT="109728" marB="109728" anchor="ctr">
                     <a:lnL w="9525" cap="flat" cmpd="sng" algn="ctr">
                       <a:solidFill>
-                        <a:srgbClr val="D5DDE8"/>
+                        <a:srgbClr val="D2E6F4"/>
                       </a:solidFill>
                       <a:prstDash val="solid"/>
                       <a:round/>
@@ -3117,7 +3525,7 @@
                     </a:lnL>
                     <a:lnR w="9525" cap="flat" cmpd="sng" algn="ctr">
                       <a:solidFill>
-                        <a:srgbClr val="D5DDE8"/>
+                        <a:srgbClr val="D2E6F4"/>
                       </a:solidFill>
                       <a:prstDash val="solid"/>
                       <a:round/>
@@ -3126,7 +3534,7 @@
                     </a:lnR>
                     <a:lnT w="9525" cap="flat" cmpd="sng" algn="ctr">
                       <a:solidFill>
-                        <a:srgbClr val="D5DDE8"/>
+                        <a:srgbClr val="D2E6F4"/>
                       </a:solidFill>
                       <a:prstDash val="solid"/>
                       <a:round/>
@@ -3135,7 +3543,7 @@
                     </a:lnT>
                     <a:lnB w="9525" cap="flat" cmpd="sng" algn="ctr">
                       <a:solidFill>
-                        <a:srgbClr val="D5DDE8"/>
+                        <a:srgbClr val="D2E6F4"/>
                       </a:solidFill>
                       <a:prstDash val="solid"/>
                       <a:round/>
@@ -3143,7 +3551,7 @@
                       <a:tailEnd type="none" w="med" len="med"/>
                     </a:lnB>
                     <a:solidFill>
-                      <a:srgbClr val="F4F7FB"/>
+                      <a:srgbClr val="F2F8FD"/>
                     </a:solidFill>
                   </a:tcPr>
                 </a:tc>
@@ -3176,7 +3584,7 @@
                   <a:tcPr marL="109728" marR="109728" marT="109728" marB="109728" anchor="ctr">
                     <a:lnL w="9525" cap="flat" cmpd="sng" algn="ctr">
                       <a:solidFill>
-                        <a:srgbClr val="D5DDE8"/>
+                        <a:srgbClr val="D2E6F4"/>
                       </a:solidFill>
                       <a:prstDash val="solid"/>
                       <a:round/>
@@ -3185,7 +3593,7 @@
                     </a:lnL>
                     <a:lnR w="9525" cap="flat" cmpd="sng" algn="ctr">
                       <a:solidFill>
-                        <a:srgbClr val="D5DDE8"/>
+                        <a:srgbClr val="D2E6F4"/>
                       </a:solidFill>
                       <a:prstDash val="solid"/>
                       <a:round/>
@@ -3194,7 +3602,7 @@
                     </a:lnR>
                     <a:lnT w="9525" cap="flat" cmpd="sng" algn="ctr">
                       <a:solidFill>
-                        <a:srgbClr val="D5DDE8"/>
+                        <a:srgbClr val="D2E6F4"/>
                       </a:solidFill>
                       <a:prstDash val="solid"/>
                       <a:round/>
@@ -3203,7 +3611,7 @@
                     </a:lnT>
                     <a:lnB w="9525" cap="flat" cmpd="sng" algn="ctr">
                       <a:solidFill>
-                        <a:srgbClr val="D5DDE8"/>
+                        <a:srgbClr val="D2E6F4"/>
                       </a:solidFill>
                       <a:prstDash val="solid"/>
                       <a:round/>
@@ -3211,7 +3619,7 @@
                       <a:tailEnd type="none" w="med" len="med"/>
                     </a:lnB>
                     <a:solidFill>
-                      <a:srgbClr val="F4F7FB"/>
+                      <a:srgbClr val="F2F8FD"/>
                     </a:solidFill>
                   </a:tcPr>
                 </a:tc>
@@ -3228,7 +3636,7 @@
                       <a:r>
                         <a:rPr lang="en-US" sz="1500" b="1" dirty="0">
                           <a:solidFill>
-                            <a:srgbClr val="0F766E"/>
+                            <a:srgbClr val="1E7FC0"/>
                           </a:solidFill>
                           <a:latin typeface="Arial" pitchFamily="34" charset="0"/>
                           <a:ea typeface="Arial" pitchFamily="34" charset="-122"/>
@@ -3246,7 +3654,7 @@
                   <a:tcPr marL="109728" marR="109728" marT="109728" marB="109728" anchor="ctr">
                     <a:lnL w="9525" cap="flat" cmpd="sng" algn="ctr">
                       <a:solidFill>
-                        <a:srgbClr val="D5DDE8"/>
+                        <a:srgbClr val="D2E6F4"/>
                       </a:solidFill>
                       <a:prstDash val="solid"/>
                       <a:round/>
@@ -3255,7 +3663,7 @@
                     </a:lnL>
                     <a:lnR w="9525" cap="flat" cmpd="sng" algn="ctr">
                       <a:solidFill>
-                        <a:srgbClr val="D5DDE8"/>
+                        <a:srgbClr val="D2E6F4"/>
                       </a:solidFill>
                       <a:prstDash val="solid"/>
                       <a:round/>
@@ -3264,7 +3672,7 @@
                     </a:lnR>
                     <a:lnT w="9525" cap="flat" cmpd="sng" algn="ctr">
                       <a:solidFill>
-                        <a:srgbClr val="D5DDE8"/>
+                        <a:srgbClr val="D2E6F4"/>
                       </a:solidFill>
                       <a:prstDash val="solid"/>
                       <a:round/>
@@ -3273,7 +3681,7 @@
                     </a:lnT>
                     <a:lnB w="9525" cap="flat" cmpd="sng" algn="ctr">
                       <a:solidFill>
-                        <a:srgbClr val="D5DDE8"/>
+                        <a:srgbClr val="D2E6F4"/>
                       </a:solidFill>
                       <a:prstDash val="solid"/>
                       <a:round/>
@@ -3314,7 +3722,7 @@
                   <a:tcPr marL="109728" marR="109728" marT="109728" marB="109728" anchor="ctr">
                     <a:lnL w="9525" cap="flat" cmpd="sng" algn="ctr">
                       <a:solidFill>
-                        <a:srgbClr val="D5DDE8"/>
+                        <a:srgbClr val="D2E6F4"/>
                       </a:solidFill>
                       <a:prstDash val="solid"/>
                       <a:round/>
@@ -3323,7 +3731,7 @@
                     </a:lnL>
                     <a:lnR w="9525" cap="flat" cmpd="sng" algn="ctr">
                       <a:solidFill>
-                        <a:srgbClr val="D5DDE8"/>
+                        <a:srgbClr val="D2E6F4"/>
                       </a:solidFill>
                       <a:prstDash val="solid"/>
                       <a:round/>
@@ -3332,7 +3740,7 @@
                     </a:lnR>
                     <a:lnT w="9525" cap="flat" cmpd="sng" algn="ctr">
                       <a:solidFill>
-                        <a:srgbClr val="D5DDE8"/>
+                        <a:srgbClr val="D2E6F4"/>
                       </a:solidFill>
                       <a:prstDash val="solid"/>
                       <a:round/>
@@ -3341,7 +3749,7 @@
                     </a:lnT>
                     <a:lnB w="9525" cap="flat" cmpd="sng" algn="ctr">
                       <a:solidFill>
-                        <a:srgbClr val="D5DDE8"/>
+                        <a:srgbClr val="D2E6F4"/>
                       </a:solidFill>
                       <a:prstDash val="solid"/>
                       <a:round/>
@@ -3382,7 +3790,7 @@
                   <a:tcPr marL="109728" marR="109728" marT="109728" marB="109728" anchor="ctr">
                     <a:lnL w="9525" cap="flat" cmpd="sng" algn="ctr">
                       <a:solidFill>
-                        <a:srgbClr val="D5DDE8"/>
+                        <a:srgbClr val="D2E6F4"/>
                       </a:solidFill>
                       <a:prstDash val="solid"/>
                       <a:round/>
@@ -3391,7 +3799,7 @@
                     </a:lnL>
                     <a:lnR w="9525" cap="flat" cmpd="sng" algn="ctr">
                       <a:solidFill>
-                        <a:srgbClr val="D5DDE8"/>
+                        <a:srgbClr val="D2E6F4"/>
                       </a:solidFill>
                       <a:prstDash val="solid"/>
                       <a:round/>
@@ -3400,7 +3808,7 @@
                     </a:lnR>
                     <a:lnT w="9525" cap="flat" cmpd="sng" algn="ctr">
                       <a:solidFill>
-                        <a:srgbClr val="D5DDE8"/>
+                        <a:srgbClr val="D2E6F4"/>
                       </a:solidFill>
                       <a:prstDash val="solid"/>
                       <a:round/>
@@ -3409,7 +3817,7 @@
                     </a:lnT>
                     <a:lnB w="9525" cap="flat" cmpd="sng" algn="ctr">
                       <a:solidFill>
-                        <a:srgbClr val="D5DDE8"/>
+                        <a:srgbClr val="D2E6F4"/>
                       </a:solidFill>
                       <a:prstDash val="solid"/>
                       <a:round/>
@@ -3434,7 +3842,7 @@
                       <a:r>
                         <a:rPr lang="en-US" sz="1500" b="1" dirty="0">
                           <a:solidFill>
-                            <a:srgbClr val="0F766E"/>
+                            <a:srgbClr val="1E7FC0"/>
                           </a:solidFill>
                           <a:latin typeface="Arial" pitchFamily="34" charset="0"/>
                           <a:ea typeface="Arial" pitchFamily="34" charset="-122"/>
@@ -3452,7 +3860,7 @@
                   <a:tcPr marL="109728" marR="109728" marT="109728" marB="109728" anchor="ctr">
                     <a:lnL w="9525" cap="flat" cmpd="sng" algn="ctr">
                       <a:solidFill>
-                        <a:srgbClr val="D5DDE8"/>
+                        <a:srgbClr val="D2E6F4"/>
                       </a:solidFill>
                       <a:prstDash val="solid"/>
                       <a:round/>
@@ -3461,7 +3869,7 @@
                     </a:lnL>
                     <a:lnR w="9525" cap="flat" cmpd="sng" algn="ctr">
                       <a:solidFill>
-                        <a:srgbClr val="D5DDE8"/>
+                        <a:srgbClr val="D2E6F4"/>
                       </a:solidFill>
                       <a:prstDash val="solid"/>
                       <a:round/>
@@ -3470,7 +3878,7 @@
                     </a:lnR>
                     <a:lnT w="9525" cap="flat" cmpd="sng" algn="ctr">
                       <a:solidFill>
-                        <a:srgbClr val="D5DDE8"/>
+                        <a:srgbClr val="D2E6F4"/>
                       </a:solidFill>
                       <a:prstDash val="solid"/>
                       <a:round/>
@@ -3479,7 +3887,7 @@
                     </a:lnT>
                     <a:lnB w="9525" cap="flat" cmpd="sng" algn="ctr">
                       <a:solidFill>
-                        <a:srgbClr val="D5DDE8"/>
+                        <a:srgbClr val="D2E6F4"/>
                       </a:solidFill>
                       <a:prstDash val="solid"/>
                       <a:round/>
@@ -3487,7 +3895,7 @@
                       <a:tailEnd type="none" w="med" len="med"/>
                     </a:lnB>
                     <a:solidFill>
-                      <a:srgbClr val="F4F7FB"/>
+                      <a:srgbClr val="F2F8FD"/>
                     </a:solidFill>
                   </a:tcPr>
                 </a:tc>
@@ -3520,7 +3928,7 @@
                   <a:tcPr marL="109728" marR="109728" marT="109728" marB="109728" anchor="ctr">
                     <a:lnL w="9525" cap="flat" cmpd="sng" algn="ctr">
                       <a:solidFill>
-                        <a:srgbClr val="D5DDE8"/>
+                        <a:srgbClr val="D2E6F4"/>
                       </a:solidFill>
                       <a:prstDash val="solid"/>
                       <a:round/>
@@ -3529,7 +3937,7 @@
                     </a:lnL>
                     <a:lnR w="9525" cap="flat" cmpd="sng" algn="ctr">
                       <a:solidFill>
-                        <a:srgbClr val="D5DDE8"/>
+                        <a:srgbClr val="D2E6F4"/>
                       </a:solidFill>
                       <a:prstDash val="solid"/>
                       <a:round/>
@@ -3538,7 +3946,7 @@
                     </a:lnR>
                     <a:lnT w="9525" cap="flat" cmpd="sng" algn="ctr">
                       <a:solidFill>
-                        <a:srgbClr val="D5DDE8"/>
+                        <a:srgbClr val="D2E6F4"/>
                       </a:solidFill>
                       <a:prstDash val="solid"/>
                       <a:round/>
@@ -3547,7 +3955,7 @@
                     </a:lnT>
                     <a:lnB w="9525" cap="flat" cmpd="sng" algn="ctr">
                       <a:solidFill>
-                        <a:srgbClr val="D5DDE8"/>
+                        <a:srgbClr val="D2E6F4"/>
                       </a:solidFill>
                       <a:prstDash val="solid"/>
                       <a:round/>
@@ -3555,7 +3963,7 @@
                       <a:tailEnd type="none" w="med" len="med"/>
                     </a:lnB>
                     <a:solidFill>
-                      <a:srgbClr val="F4F7FB"/>
+                      <a:srgbClr val="F2F8FD"/>
                     </a:solidFill>
                   </a:tcPr>
                 </a:tc>
@@ -3588,7 +3996,7 @@
                   <a:tcPr marL="109728" marR="109728" marT="109728" marB="109728" anchor="ctr">
                     <a:lnL w="9525" cap="flat" cmpd="sng" algn="ctr">
                       <a:solidFill>
-                        <a:srgbClr val="D5DDE8"/>
+                        <a:srgbClr val="D2E6F4"/>
                       </a:solidFill>
                       <a:prstDash val="solid"/>
                       <a:round/>
@@ -3597,7 +4005,7 @@
                     </a:lnL>
                     <a:lnR w="9525" cap="flat" cmpd="sng" algn="ctr">
                       <a:solidFill>
-                        <a:srgbClr val="D5DDE8"/>
+                        <a:srgbClr val="D2E6F4"/>
                       </a:solidFill>
                       <a:prstDash val="solid"/>
                       <a:round/>
@@ -3606,7 +4014,7 @@
                     </a:lnR>
                     <a:lnT w="9525" cap="flat" cmpd="sng" algn="ctr">
                       <a:solidFill>
-                        <a:srgbClr val="D5DDE8"/>
+                        <a:srgbClr val="D2E6F4"/>
                       </a:solidFill>
                       <a:prstDash val="solid"/>
                       <a:round/>
@@ -3615,7 +4023,7 @@
                     </a:lnT>
                     <a:lnB w="9525" cap="flat" cmpd="sng" algn="ctr">
                       <a:solidFill>
-                        <a:srgbClr val="D5DDE8"/>
+                        <a:srgbClr val="D2E6F4"/>
                       </a:solidFill>
                       <a:prstDash val="solid"/>
                       <a:round/>
@@ -3623,7 +4031,7 @@
                       <a:tailEnd type="none" w="med" len="med"/>
                     </a:lnB>
                     <a:solidFill>
-                      <a:srgbClr val="F4F7FB"/>
+                      <a:srgbClr val="F2F8FD"/>
                     </a:solidFill>
                   </a:tcPr>
                 </a:tc>
@@ -3640,7 +4048,7 @@
                       <a:r>
                         <a:rPr lang="en-US" sz="1500" b="1" dirty="0">
                           <a:solidFill>
-                            <a:srgbClr val="0F766E"/>
+                            <a:srgbClr val="1E7FC0"/>
                           </a:solidFill>
                           <a:latin typeface="Arial" pitchFamily="34" charset="0"/>
                           <a:ea typeface="Arial" pitchFamily="34" charset="-122"/>
@@ -3658,7 +4066,7 @@
                   <a:tcPr marL="109728" marR="109728" marT="109728" marB="109728" anchor="ctr">
                     <a:lnL w="9525" cap="flat" cmpd="sng" algn="ctr">
                       <a:solidFill>
-                        <a:srgbClr val="D5DDE8"/>
+                        <a:srgbClr val="D2E6F4"/>
                       </a:solidFill>
                       <a:prstDash val="solid"/>
                       <a:round/>
@@ -3667,7 +4075,7 @@
                     </a:lnL>
                     <a:lnR w="9525" cap="flat" cmpd="sng" algn="ctr">
                       <a:solidFill>
-                        <a:srgbClr val="D5DDE8"/>
+                        <a:srgbClr val="D2E6F4"/>
                       </a:solidFill>
                       <a:prstDash val="solid"/>
                       <a:round/>
@@ -3676,7 +4084,7 @@
                     </a:lnR>
                     <a:lnT w="9525" cap="flat" cmpd="sng" algn="ctr">
                       <a:solidFill>
-                        <a:srgbClr val="D5DDE8"/>
+                        <a:srgbClr val="D2E6F4"/>
                       </a:solidFill>
                       <a:prstDash val="solid"/>
                       <a:round/>
@@ -3685,7 +4093,7 @@
                     </a:lnT>
                     <a:lnB w="9525" cap="flat" cmpd="sng" algn="ctr">
                       <a:solidFill>
-                        <a:srgbClr val="D5DDE8"/>
+                        <a:srgbClr val="D2E6F4"/>
                       </a:solidFill>
                       <a:prstDash val="solid"/>
                       <a:round/>
@@ -3726,7 +4134,7 @@
                   <a:tcPr marL="109728" marR="109728" marT="109728" marB="109728" anchor="ctr">
                     <a:lnL w="9525" cap="flat" cmpd="sng" algn="ctr">
                       <a:solidFill>
-                        <a:srgbClr val="D5DDE8"/>
+                        <a:srgbClr val="D2E6F4"/>
                       </a:solidFill>
                       <a:prstDash val="solid"/>
                       <a:round/>
@@ -3735,7 +4143,7 @@
                     </a:lnL>
                     <a:lnR w="9525" cap="flat" cmpd="sng" algn="ctr">
                       <a:solidFill>
-                        <a:srgbClr val="D5DDE8"/>
+                        <a:srgbClr val="D2E6F4"/>
                       </a:solidFill>
                       <a:prstDash val="solid"/>
                       <a:round/>
@@ -3744,7 +4152,7 @@
                     </a:lnR>
                     <a:lnT w="9525" cap="flat" cmpd="sng" algn="ctr">
                       <a:solidFill>
-                        <a:srgbClr val="D5DDE8"/>
+                        <a:srgbClr val="D2E6F4"/>
                       </a:solidFill>
                       <a:prstDash val="solid"/>
                       <a:round/>
@@ -3753,7 +4161,7 @@
                     </a:lnT>
                     <a:lnB w="9525" cap="flat" cmpd="sng" algn="ctr">
                       <a:solidFill>
-                        <a:srgbClr val="D5DDE8"/>
+                        <a:srgbClr val="D2E6F4"/>
                       </a:solidFill>
                       <a:prstDash val="solid"/>
                       <a:round/>
@@ -3794,7 +4202,7 @@
                   <a:tcPr marL="109728" marR="109728" marT="109728" marB="109728" anchor="ctr">
                     <a:lnL w="9525" cap="flat" cmpd="sng" algn="ctr">
                       <a:solidFill>
-                        <a:srgbClr val="D5DDE8"/>
+                        <a:srgbClr val="D2E6F4"/>
                       </a:solidFill>
                       <a:prstDash val="solid"/>
                       <a:round/>
@@ -3803,7 +4211,7 @@
                     </a:lnL>
                     <a:lnR w="9525" cap="flat" cmpd="sng" algn="ctr">
                       <a:solidFill>
-                        <a:srgbClr val="D5DDE8"/>
+                        <a:srgbClr val="D2E6F4"/>
                       </a:solidFill>
                       <a:prstDash val="solid"/>
                       <a:round/>
@@ -3812,7 +4220,7 @@
                     </a:lnR>
                     <a:lnT w="9525" cap="flat" cmpd="sng" algn="ctr">
                       <a:solidFill>
-                        <a:srgbClr val="D5DDE8"/>
+                        <a:srgbClr val="D2E6F4"/>
                       </a:solidFill>
                       <a:prstDash val="solid"/>
                       <a:round/>
@@ -3821,7 +4229,7 @@
                     </a:lnT>
                     <a:lnB w="9525" cap="flat" cmpd="sng" algn="ctr">
                       <a:solidFill>
-                        <a:srgbClr val="D5DDE8"/>
+                        <a:srgbClr val="D2E6F4"/>
                       </a:solidFill>
                       <a:prstDash val="solid"/>
                       <a:round/>
@@ -3916,6 +4324,118 @@
           </a:p>
         </p:txBody>
       </p:sp>
+      <p:sp>
+        <p:nvSpPr>
+          <p:cNvPr id="7" name="Rectangle 6"/>
+          <p:cNvSpPr/>
+          <p:nvPr/>
+        </p:nvSpPr>
+        <p:spPr>
+          <a:xfrm>
+            <a:off x="0" y="0"/>
+            <a:ext cx="12192000" cy="82296"/>
+          </a:xfrm>
+          <a:prstGeom prst="rect">
+            <a:avLst/>
+          </a:prstGeom>
+          <a:solidFill>
+            <a:srgbClr val="0A0F1A"/>
+          </a:solidFill>
+          <a:ln>
+            <a:noFill/>
+          </a:ln>
+          <a:effectLst/>
+        </p:spPr>
+        <p:style>
+          <a:lnRef idx="1">
+            <a:schemeClr val="accent1"/>
+          </a:lnRef>
+          <a:fillRef idx="3">
+            <a:schemeClr val="accent1"/>
+          </a:fillRef>
+          <a:effectRef idx="2">
+            <a:schemeClr val="accent1"/>
+          </a:effectRef>
+          <a:fontRef idx="minor">
+            <a:schemeClr val="lt1"/>
+          </a:fontRef>
+        </p:style>
+        <p:txBody>
+          <a:bodyPr rtlCol="0" anchor="ctr"/>
+          <a:lstStyle/>
+          <a:p>
+            <a:pPr algn="ctr"/>
+          </a:p>
+        </p:txBody>
+      </p:sp>
+      <p:sp>
+        <p:nvSpPr>
+          <p:cNvPr id="8" name="Rectangle 7"/>
+          <p:cNvSpPr/>
+          <p:nvPr/>
+        </p:nvSpPr>
+        <p:spPr>
+          <a:xfrm>
+            <a:off x="0" y="82296"/>
+            <a:ext cx="1463040" cy="45720"/>
+          </a:xfrm>
+          <a:prstGeom prst="rect">
+            <a:avLst/>
+          </a:prstGeom>
+          <a:solidFill>
+            <a:srgbClr val="3CA8E4"/>
+          </a:solidFill>
+          <a:ln>
+            <a:noFill/>
+          </a:ln>
+          <a:effectLst/>
+        </p:spPr>
+        <p:style>
+          <a:lnRef idx="1">
+            <a:schemeClr val="accent1"/>
+          </a:lnRef>
+          <a:fillRef idx="3">
+            <a:schemeClr val="accent1"/>
+          </a:fillRef>
+          <a:effectRef idx="2">
+            <a:schemeClr val="accent1"/>
+          </a:effectRef>
+          <a:fontRef idx="minor">
+            <a:schemeClr val="lt1"/>
+          </a:fontRef>
+        </p:style>
+        <p:txBody>
+          <a:bodyPr rtlCol="0" anchor="ctr"/>
+          <a:lstStyle/>
+          <a:p>
+            <a:pPr algn="ctr"/>
+          </a:p>
+        </p:txBody>
+      </p:sp>
+      <p:pic>
+        <p:nvPicPr>
+          <p:cNvPr id="9" name="Picture 8" descr="creatrix_logo.png"/>
+          <p:cNvPicPr>
+            <a:picLocks noChangeAspect="1"/>
+          </p:cNvPicPr>
+          <p:nvPr/>
+        </p:nvPicPr>
+        <p:blipFill>
+          <a:blip r:embed="rId3"/>
+          <a:stretch>
+            <a:fillRect/>
+          </a:stretch>
+        </p:blipFill>
+        <p:spPr>
+          <a:xfrm>
+            <a:off x="10446650" y="6336792"/>
+            <a:ext cx="838939" cy="384048"/>
+          </a:xfrm>
+          <a:prstGeom prst="rect">
+            <a:avLst/>
+          </a:prstGeom>
+        </p:spPr>
+      </p:pic>
     </p:spTree>
   </p:cSld>
   <p:clrMapOvr>
@@ -3975,7 +4495,7 @@
             <a:r>
               <a:rPr lang="en-US" sz="2600" b="1" dirty="0">
                 <a:solidFill>
-                  <a:srgbClr val="15253D"/>
+                  <a:srgbClr val="0A0F1A"/>
                 </a:solidFill>
                 <a:latin typeface="Arial" pitchFamily="34" charset="0"/>
                 <a:ea typeface="Arial" pitchFamily="34" charset="-122"/>
@@ -4041,11 +4561,11 @@
             <a:avLst/>
           </a:prstGeom>
           <a:solidFill>
-            <a:srgbClr val="F4F7FB"/>
+            <a:srgbClr val="F2F8FD"/>
           </a:solidFill>
           <a:ln w="12700">
             <a:solidFill>
-              <a:srgbClr val="F4F7FB"/>
+              <a:srgbClr val="F2F8FD"/>
             </a:solidFill>
             <a:prstDash val="solid"/>
           </a:ln>
@@ -4078,7 +4598,7 @@
             <a:r>
               <a:rPr lang="en-US" sz="7200" b="1" dirty="0">
                 <a:solidFill>
-                  <a:srgbClr val="0F766E"/>
+                  <a:srgbClr val="1E7FC0"/>
                 </a:solidFill>
                 <a:latin typeface="Arial" pitchFamily="34" charset="0"/>
                 <a:ea typeface="Arial" pitchFamily="34" charset="-122"/>
@@ -4144,11 +4664,11 @@
             <a:avLst/>
           </a:prstGeom>
           <a:solidFill>
-            <a:srgbClr val="F4F7FB"/>
+            <a:srgbClr val="F2F8FD"/>
           </a:solidFill>
           <a:ln w="12700">
             <a:solidFill>
-              <a:srgbClr val="F4F7FB"/>
+              <a:srgbClr val="F2F8FD"/>
             </a:solidFill>
             <a:prstDash val="solid"/>
           </a:ln>
@@ -4181,7 +4701,7 @@
             <a:r>
               <a:rPr lang="en-US" sz="7200" b="1" dirty="0">
                 <a:solidFill>
-                  <a:srgbClr val="0F766E"/>
+                  <a:srgbClr val="1E7FC0"/>
                 </a:solidFill>
                 <a:latin typeface="Arial" pitchFamily="34" charset="0"/>
                 <a:ea typeface="Arial" pitchFamily="34" charset="-122"/>
@@ -4310,6 +4830,118 @@
           </a:p>
         </p:txBody>
       </p:sp>
+      <p:sp>
+        <p:nvSpPr>
+          <p:cNvPr id="12" name="Rectangle 11"/>
+          <p:cNvSpPr/>
+          <p:nvPr/>
+        </p:nvSpPr>
+        <p:spPr>
+          <a:xfrm>
+            <a:off x="0" y="0"/>
+            <a:ext cx="12192000" cy="82296"/>
+          </a:xfrm>
+          <a:prstGeom prst="rect">
+            <a:avLst/>
+          </a:prstGeom>
+          <a:solidFill>
+            <a:srgbClr val="0A0F1A"/>
+          </a:solidFill>
+          <a:ln>
+            <a:noFill/>
+          </a:ln>
+          <a:effectLst/>
+        </p:spPr>
+        <p:style>
+          <a:lnRef idx="1">
+            <a:schemeClr val="accent1"/>
+          </a:lnRef>
+          <a:fillRef idx="3">
+            <a:schemeClr val="accent1"/>
+          </a:fillRef>
+          <a:effectRef idx="2">
+            <a:schemeClr val="accent1"/>
+          </a:effectRef>
+          <a:fontRef idx="minor">
+            <a:schemeClr val="lt1"/>
+          </a:fontRef>
+        </p:style>
+        <p:txBody>
+          <a:bodyPr rtlCol="0" anchor="ctr"/>
+          <a:lstStyle/>
+          <a:p>
+            <a:pPr algn="ctr"/>
+          </a:p>
+        </p:txBody>
+      </p:sp>
+      <p:sp>
+        <p:nvSpPr>
+          <p:cNvPr id="13" name="Rectangle 12"/>
+          <p:cNvSpPr/>
+          <p:nvPr/>
+        </p:nvSpPr>
+        <p:spPr>
+          <a:xfrm>
+            <a:off x="0" y="82296"/>
+            <a:ext cx="1463040" cy="45720"/>
+          </a:xfrm>
+          <a:prstGeom prst="rect">
+            <a:avLst/>
+          </a:prstGeom>
+          <a:solidFill>
+            <a:srgbClr val="3CA8E4"/>
+          </a:solidFill>
+          <a:ln>
+            <a:noFill/>
+          </a:ln>
+          <a:effectLst/>
+        </p:spPr>
+        <p:style>
+          <a:lnRef idx="1">
+            <a:schemeClr val="accent1"/>
+          </a:lnRef>
+          <a:fillRef idx="3">
+            <a:schemeClr val="accent1"/>
+          </a:fillRef>
+          <a:effectRef idx="2">
+            <a:schemeClr val="accent1"/>
+          </a:effectRef>
+          <a:fontRef idx="minor">
+            <a:schemeClr val="lt1"/>
+          </a:fontRef>
+        </p:style>
+        <p:txBody>
+          <a:bodyPr rtlCol="0" anchor="ctr"/>
+          <a:lstStyle/>
+          <a:p>
+            <a:pPr algn="ctr"/>
+          </a:p>
+        </p:txBody>
+      </p:sp>
+      <p:pic>
+        <p:nvPicPr>
+          <p:cNvPr id="14" name="Picture 13" descr="creatrix_logo.png"/>
+          <p:cNvPicPr>
+            <a:picLocks noChangeAspect="1"/>
+          </p:cNvPicPr>
+          <p:nvPr/>
+        </p:nvPicPr>
+        <p:blipFill>
+          <a:blip r:embed="rId3"/>
+          <a:stretch>
+            <a:fillRect/>
+          </a:stretch>
+        </p:blipFill>
+        <p:spPr>
+          <a:xfrm>
+            <a:off x="10446650" y="6336792"/>
+            <a:ext cx="838939" cy="384048"/>
+          </a:xfrm>
+          <a:prstGeom prst="rect">
+            <a:avLst/>
+          </a:prstGeom>
+        </p:spPr>
+      </p:pic>
     </p:spTree>
   </p:cSld>
   <p:clrMapOvr>
@@ -4369,7 +5001,7 @@
             <a:r>
               <a:rPr lang="en-US" sz="2600" b="1" dirty="0">
                 <a:solidFill>
-                  <a:srgbClr val="15253D"/>
+                  <a:srgbClr val="0A0F1A"/>
                 </a:solidFill>
                 <a:latin typeface="Arial" pitchFamily="34" charset="0"/>
                 <a:ea typeface="Arial" pitchFamily="34" charset="-122"/>
@@ -4408,7 +5040,7 @@
             <a:r>
               <a:rPr lang="en-US" sz="1500" b="1" dirty="0">
                 <a:solidFill>
-                  <a:srgbClr val="0F766E"/>
+                  <a:srgbClr val="1E7FC0"/>
                 </a:solidFill>
                 <a:latin typeface="Arial" pitchFamily="34" charset="0"/>
                 <a:ea typeface="Arial" pitchFamily="34" charset="-122"/>
@@ -4553,7 +5185,7 @@
             <a:r>
               <a:rPr lang="en-US" sz="1500" b="1" dirty="0">
                 <a:solidFill>
-                  <a:srgbClr val="EA580C"/>
+                  <a:srgbClr val="3CA8E4"/>
                 </a:solidFill>
                 <a:latin typeface="Arial" pitchFamily="34" charset="0"/>
                 <a:ea typeface="Arial" pitchFamily="34" charset="-122"/>
@@ -4580,11 +5212,11 @@
             <a:avLst/>
           </a:prstGeom>
           <a:solidFill>
-            <a:srgbClr val="F4F7FB"/>
+            <a:srgbClr val="F2F8FD"/>
           </a:solidFill>
           <a:ln w="12700">
             <a:solidFill>
-              <a:srgbClr val="F4F7FB"/>
+              <a:srgbClr val="F2F8FD"/>
             </a:solidFill>
             <a:prstDash val="solid"/>
           </a:ln>
@@ -4724,11 +5356,11 @@
             <a:avLst/>
           </a:prstGeom>
           <a:solidFill>
-            <a:srgbClr val="F4F7FB"/>
+            <a:srgbClr val="F2F8FD"/>
           </a:solidFill>
           <a:ln w="12700">
             <a:solidFill>
-              <a:srgbClr val="F4F7FB"/>
+              <a:srgbClr val="F2F8FD"/>
             </a:solidFill>
             <a:prstDash val="solid"/>
           </a:ln>
@@ -4868,11 +5500,11 @@
             <a:avLst/>
           </a:prstGeom>
           <a:solidFill>
-            <a:srgbClr val="F4F7FB"/>
+            <a:srgbClr val="F2F8FD"/>
           </a:solidFill>
           <a:ln w="12700">
             <a:solidFill>
-              <a:srgbClr val="F4F7FB"/>
+              <a:srgbClr val="F2F8FD"/>
             </a:solidFill>
             <a:prstDash val="solid"/>
           </a:ln>
@@ -5012,11 +5644,11 @@
             <a:avLst/>
           </a:prstGeom>
           <a:solidFill>
-            <a:srgbClr val="F4F7FB"/>
+            <a:srgbClr val="F2F8FD"/>
           </a:solidFill>
           <a:ln w="12700">
             <a:solidFill>
-              <a:srgbClr val="F4F7FB"/>
+              <a:srgbClr val="F2F8FD"/>
             </a:solidFill>
             <a:prstDash val="solid"/>
           </a:ln>
@@ -5219,6 +5851,118 @@
           </a:p>
         </p:txBody>
       </p:sp>
+      <p:sp>
+        <p:nvSpPr>
+          <p:cNvPr id="24" name="Rectangle 23"/>
+          <p:cNvSpPr/>
+          <p:nvPr/>
+        </p:nvSpPr>
+        <p:spPr>
+          <a:xfrm>
+            <a:off x="0" y="0"/>
+            <a:ext cx="12192000" cy="82296"/>
+          </a:xfrm>
+          <a:prstGeom prst="rect">
+            <a:avLst/>
+          </a:prstGeom>
+          <a:solidFill>
+            <a:srgbClr val="0A0F1A"/>
+          </a:solidFill>
+          <a:ln>
+            <a:noFill/>
+          </a:ln>
+          <a:effectLst/>
+        </p:spPr>
+        <p:style>
+          <a:lnRef idx="1">
+            <a:schemeClr val="accent1"/>
+          </a:lnRef>
+          <a:fillRef idx="3">
+            <a:schemeClr val="accent1"/>
+          </a:fillRef>
+          <a:effectRef idx="2">
+            <a:schemeClr val="accent1"/>
+          </a:effectRef>
+          <a:fontRef idx="minor">
+            <a:schemeClr val="lt1"/>
+          </a:fontRef>
+        </p:style>
+        <p:txBody>
+          <a:bodyPr rtlCol="0" anchor="ctr"/>
+          <a:lstStyle/>
+          <a:p>
+            <a:pPr algn="ctr"/>
+          </a:p>
+        </p:txBody>
+      </p:sp>
+      <p:sp>
+        <p:nvSpPr>
+          <p:cNvPr id="25" name="Rectangle 24"/>
+          <p:cNvSpPr/>
+          <p:nvPr/>
+        </p:nvSpPr>
+        <p:spPr>
+          <a:xfrm>
+            <a:off x="0" y="82296"/>
+            <a:ext cx="1463040" cy="45720"/>
+          </a:xfrm>
+          <a:prstGeom prst="rect">
+            <a:avLst/>
+          </a:prstGeom>
+          <a:solidFill>
+            <a:srgbClr val="3CA8E4"/>
+          </a:solidFill>
+          <a:ln>
+            <a:noFill/>
+          </a:ln>
+          <a:effectLst/>
+        </p:spPr>
+        <p:style>
+          <a:lnRef idx="1">
+            <a:schemeClr val="accent1"/>
+          </a:lnRef>
+          <a:fillRef idx="3">
+            <a:schemeClr val="accent1"/>
+          </a:fillRef>
+          <a:effectRef idx="2">
+            <a:schemeClr val="accent1"/>
+          </a:effectRef>
+          <a:fontRef idx="minor">
+            <a:schemeClr val="lt1"/>
+          </a:fontRef>
+        </p:style>
+        <p:txBody>
+          <a:bodyPr rtlCol="0" anchor="ctr"/>
+          <a:lstStyle/>
+          <a:p>
+            <a:pPr algn="ctr"/>
+          </a:p>
+        </p:txBody>
+      </p:sp>
+      <p:pic>
+        <p:nvPicPr>
+          <p:cNvPr id="26" name="Picture 25" descr="creatrix_logo.png"/>
+          <p:cNvPicPr>
+            <a:picLocks noChangeAspect="1"/>
+          </p:cNvPicPr>
+          <p:nvPr/>
+        </p:nvPicPr>
+        <p:blipFill>
+          <a:blip r:embed="rId3"/>
+          <a:stretch>
+            <a:fillRect/>
+          </a:stretch>
+        </p:blipFill>
+        <p:spPr>
+          <a:xfrm>
+            <a:off x="10446650" y="6336792"/>
+            <a:ext cx="838939" cy="384048"/>
+          </a:xfrm>
+          <a:prstGeom prst="rect">
+            <a:avLst/>
+          </a:prstGeom>
+        </p:spPr>
+      </p:pic>
     </p:spTree>
   </p:cSld>
   <p:clrMapOvr>
